--- a/Bikin-Website/M03-Prompt-untuk-Desain-Katalog/BW-M03-Prompt-untuk-Desain-Katalog.pptx
+++ b/Bikin-Website/M03-Prompt-untuk-Desain-Katalog/BW-M03-Prompt-untuk-Desain-Katalog.pptx
@@ -1900,6 +1900,70 @@
               <a:t>Upload screenshot referensi yang kamu suka langsung ke chat, lalu bilang misalnya “buat desain kayak gambar ini tapi untuk katalog produk saya.” Claude bisa membaca gambar yang kamu upload dan menangkap gaya visualnya — warna, layout, mood — jauh lebih akurat dibanding mendeskripsikannya dengan kata-kata dari nol.</a:t>
             </a:r>
             <a:endParaRPr lang="en-US" sz="1150" dirty="0"/>
+          </a:p>
+        </p:txBody>
+      </p:sp>
+      <p:sp>
+        <p:nvSpPr>
+          <p:cNvPr id="12" name="Shape 10"/>
+          <p:cNvSpPr/>
+          <p:nvPr/>
+        </p:nvSpPr>
+        <p:spPr>
+          <a:xfrm>
+            <a:off x="502920" y="5009960"/>
+            <a:ext cx="11183112" cy="1021461"/>
+          </a:xfrm>
+          <a:prstGeom prst="roundRect">
+            <a:avLst>
+              <a:gd name="adj" fmla="val 7162"/>
+            </a:avLst>
+          </a:prstGeom>
+          <a:solidFill>
+            <a:srgbClr val="0D1321"/>
+          </a:solidFill>
+          <a:ln/>
+        </p:spPr>
+      </p:sp>
+      <p:sp>
+        <p:nvSpPr>
+          <p:cNvPr id="13" name="Text 11"/>
+          <p:cNvSpPr txBox="1"/>
+          <p:nvPr/>
+        </p:nvSpPr>
+        <p:spPr>
+          <a:xfrm>
+            <a:off x="731520" y="5211128"/>
+            <a:ext cx="10725912" cy="619125"/>
+          </a:xfrm>
+          <a:prstGeom prst="rect">
+            <a:avLst/>
+          </a:prstGeom>
+          <a:noFill/>
+          <a:ln/>
+        </p:spPr>
+        <p:txBody>
+          <a:bodyPr wrap="square" lIns="0" tIns="0" rIns="0" bIns="0" rtlCol="0" anchor="ctr"/>
+          <a:lstStyle/>
+          <a:p>
+            <a:pPr indent="0" marL="0">
+              <a:lnSpc>
+                <a:spcPct val="130000"/>
+              </a:lnSpc>
+              <a:buNone/>
+            </a:pPr>
+            <a:r>
+              <a:rPr lang="en-US" sz="1250" i="1" dirty="0">
+                <a:solidFill>
+                  <a:srgbClr val="FFFFFF"/>
+                </a:solidFill>
+                <a:latin typeface="Helvetica" pitchFamily="34" charset="0"/>
+                <a:ea typeface="Helvetica" pitchFamily="34" charset="-122"/>
+                <a:cs typeface="Helvetica" pitchFamily="34" charset="-120"/>
+              </a:rPr>
+              <a:t>[upload screenshot referensi yang kamu suka] Saya suka gaya visual di gambar ini — warnanya soft, kartu produknya rapi dengan foto besar di atas. Bikinkan kerangka layout katalog produk dengan gaya serupa: grid 3 kolom, tab kategori di atas, tiap kartu produk ada foto + nama + harga.</a:t>
+            </a:r>
+            <a:endParaRPr lang="en-US" sz="1250" dirty="0"/>
           </a:p>
         </p:txBody>
       </p:sp>

--- a/Bikin-Website/M03-Prompt-untuk-Desain-Katalog/BW-M03-Prompt-untuk-Desain-Katalog.pptx
+++ b/Bikin-Website/M03-Prompt-untuk-Desain-Katalog/BW-M03-Prompt-untuk-Desain-Katalog.pptx
@@ -1903,70 +1903,6 @@
           </a:p>
         </p:txBody>
       </p:sp>
-      <p:sp>
-        <p:nvSpPr>
-          <p:cNvPr id="12" name="Shape 10"/>
-          <p:cNvSpPr/>
-          <p:nvPr/>
-        </p:nvSpPr>
-        <p:spPr>
-          <a:xfrm>
-            <a:off x="502920" y="5009960"/>
-            <a:ext cx="11183112" cy="1021461"/>
-          </a:xfrm>
-          <a:prstGeom prst="roundRect">
-            <a:avLst>
-              <a:gd name="adj" fmla="val 7162"/>
-            </a:avLst>
-          </a:prstGeom>
-          <a:solidFill>
-            <a:srgbClr val="0D1321"/>
-          </a:solidFill>
-          <a:ln/>
-        </p:spPr>
-      </p:sp>
-      <p:sp>
-        <p:nvSpPr>
-          <p:cNvPr id="13" name="Text 11"/>
-          <p:cNvSpPr txBox="1"/>
-          <p:nvPr/>
-        </p:nvSpPr>
-        <p:spPr>
-          <a:xfrm>
-            <a:off x="731520" y="5211128"/>
-            <a:ext cx="10725912" cy="619125"/>
-          </a:xfrm>
-          <a:prstGeom prst="rect">
-            <a:avLst/>
-          </a:prstGeom>
-          <a:noFill/>
-          <a:ln/>
-        </p:spPr>
-        <p:txBody>
-          <a:bodyPr wrap="square" lIns="0" tIns="0" rIns="0" bIns="0" rtlCol="0" anchor="ctr"/>
-          <a:lstStyle/>
-          <a:p>
-            <a:pPr indent="0" marL="0">
-              <a:lnSpc>
-                <a:spcPct val="130000"/>
-              </a:lnSpc>
-              <a:buNone/>
-            </a:pPr>
-            <a:r>
-              <a:rPr lang="en-US" sz="1250" i="1" dirty="0">
-                <a:solidFill>
-                  <a:srgbClr val="FFFFFF"/>
-                </a:solidFill>
-                <a:latin typeface="Helvetica" pitchFamily="34" charset="0"/>
-                <a:ea typeface="Helvetica" pitchFamily="34" charset="-122"/>
-                <a:cs typeface="Helvetica" pitchFamily="34" charset="-120"/>
-              </a:rPr>
-              <a:t>[upload screenshot referensi yang kamu suka] Saya suka gaya visual di gambar ini — warnanya soft, kartu produknya rapi dengan foto besar di atas. Bikinkan kerangka layout katalog produk dengan gaya serupa: grid 3 kolom, tab kategori di atas, tiap kartu produk ada foto + nama + harga.</a:t>
-            </a:r>
-            <a:endParaRPr lang="en-US" sz="1250" dirty="0"/>
-          </a:p>
-        </p:txBody>
-      </p:sp>
     </p:spTree>
   </p:cSld>
   <p:clrMapOvr>
@@ -3737,6 +3673,70 @@
         <p:spPr>
           <a:xfrm>
             <a:off x="502920" y="3535680"/>
+            <a:ext cx="11183112" cy="1021461"/>
+          </a:xfrm>
+          <a:prstGeom prst="roundRect">
+            <a:avLst>
+              <a:gd name="adj" fmla="val 7162"/>
+            </a:avLst>
+          </a:prstGeom>
+          <a:solidFill>
+            <a:srgbClr val="0D1321"/>
+          </a:solidFill>
+          <a:ln/>
+        </p:spPr>
+      </p:sp>
+      <p:sp>
+        <p:nvSpPr>
+          <p:cNvPr id="11" name="Text 9"/>
+          <p:cNvSpPr txBox="1"/>
+          <p:nvPr/>
+        </p:nvSpPr>
+        <p:spPr>
+          <a:xfrm>
+            <a:off x="731520" y="3736848"/>
+            <a:ext cx="10725912" cy="619125"/>
+          </a:xfrm>
+          <a:prstGeom prst="rect">
+            <a:avLst/>
+          </a:prstGeom>
+          <a:noFill/>
+          <a:ln/>
+        </p:spPr>
+        <p:txBody>
+          <a:bodyPr wrap="square" lIns="0" tIns="0" rIns="0" bIns="0" rtlCol="0" anchor="ctr"/>
+          <a:lstStyle/>
+          <a:p>
+            <a:pPr indent="0" marL="0">
+              <a:lnSpc>
+                <a:spcPct val="130000"/>
+              </a:lnSpc>
+              <a:buNone/>
+            </a:pPr>
+            <a:r>
+              <a:rPr lang="en-US" sz="1250" i="1" dirty="0">
+                <a:solidFill>
+                  <a:srgbClr val="FFFFFF"/>
+                </a:solidFill>
+                <a:latin typeface="Helvetica" pitchFamily="34" charset="0"/>
+                <a:ea typeface="Helvetica" pitchFamily="34" charset="-122"/>
+                <a:cs typeface="Helvetica" pitchFamily="34" charset="-120"/>
+              </a:rPr>
+              <a:t>[upload screenshot referensi yang kamu suka] Saya suka gaya visual di gambar ini — warnanya soft, kartu produknya rapi dengan foto besar di atas. Bikinkan kerangka layout katalog produk dengan gaya serupa: grid 3 kolom, tab kategori di atas, tiap kartu produk ada foto + nama + harga.</a:t>
+            </a:r>
+            <a:endParaRPr lang="en-US" sz="1250" dirty="0"/>
+          </a:p>
+        </p:txBody>
+      </p:sp>
+      <p:sp>
+        <p:nvSpPr>
+          <p:cNvPr id="12" name="Shape 10"/>
+          <p:cNvSpPr/>
+          <p:nvPr/>
+        </p:nvSpPr>
+        <p:spPr>
+          <a:xfrm>
+            <a:off x="502920" y="4785741"/>
             <a:ext cx="11183112" cy="1042099"/>
           </a:xfrm>
           <a:prstGeom prst="roundRect">
@@ -3757,13 +3757,13 @@
       </p:sp>
       <p:sp>
         <p:nvSpPr>
-          <p:cNvPr id="11" name="Shape 9"/>
+          <p:cNvPr id="13" name="Shape 11"/>
           <p:cNvSpPr/>
           <p:nvPr/>
         </p:nvSpPr>
         <p:spPr>
           <a:xfrm>
-            <a:off x="722376" y="3718560"/>
+            <a:off x="722376" y="4968621"/>
             <a:ext cx="365760" cy="365760"/>
           </a:xfrm>
           <a:prstGeom prst="ellipse">
@@ -3777,13 +3777,13 @@
       </p:sp>
       <p:sp>
         <p:nvSpPr>
-          <p:cNvPr id="12" name="Text 10"/>
-          <p:cNvSpPr txBox="1"/>
-          <p:nvPr/>
-        </p:nvSpPr>
-        <p:spPr>
-          <a:xfrm>
-            <a:off x="722376" y="3718560"/>
+          <p:cNvPr id="14" name="Text 12"/>
+          <p:cNvSpPr txBox="1"/>
+          <p:nvPr/>
+        </p:nvSpPr>
+        <p:spPr>
+          <a:xfrm>
+            <a:off x="722376" y="4968621"/>
             <a:ext cx="365760" cy="365760"/>
           </a:xfrm>
           <a:prstGeom prst="rect">
@@ -3816,13 +3816,13 @@
       </p:sp>
       <p:sp>
         <p:nvSpPr>
-          <p:cNvPr id="13" name="Text 11"/>
-          <p:cNvSpPr txBox="1"/>
-          <p:nvPr/>
-        </p:nvSpPr>
-        <p:spPr>
-          <a:xfrm>
-            <a:off x="1234440" y="3791712"/>
+          <p:cNvPr id="15" name="Text 13"/>
+          <p:cNvSpPr txBox="1"/>
+          <p:nvPr/>
+        </p:nvSpPr>
+        <p:spPr>
+          <a:xfrm>
+            <a:off x="1234440" y="5041773"/>
             <a:ext cx="10268712" cy="274320"/>
           </a:xfrm>
           <a:prstGeom prst="rect">
@@ -3855,13 +3855,13 @@
       </p:sp>
       <p:sp>
         <p:nvSpPr>
-          <p:cNvPr id="14" name="Text 12"/>
-          <p:cNvSpPr txBox="1"/>
-          <p:nvPr/>
-        </p:nvSpPr>
-        <p:spPr>
-          <a:xfrm>
-            <a:off x="722376" y="4194048"/>
+          <p:cNvPr id="16" name="Text 14"/>
+          <p:cNvSpPr txBox="1"/>
+          <p:nvPr/>
+        </p:nvSpPr>
+        <p:spPr>
+          <a:xfrm>
+            <a:off x="722376" y="5444109"/>
             <a:ext cx="10744200" cy="182563"/>
           </a:xfrm>
           <a:prstGeom prst="rect">
